--- a/public/pariksha-far-away-hackathon.pptx
+++ b/public/pariksha-far-away-hackathon.pptx
@@ -1816,40 +1816,49 @@
       </p:sp>
       <p:sp>
         <p:nvSpPr>
-          <p:cNvPr id="4" name="Text 2"/>
-          <p:cNvSpPr/>
-          <p:nvPr/>
-        </p:nvSpPr>
-        <p:spPr>
-          <a:xfrm>
-            <a:off x="11094415" y="6492240"/>
-            <a:ext cx="731520" cy="274320"/>
-          </a:xfrm>
-          <a:prstGeom prst="rect">
-            <a:avLst/>
-          </a:prstGeom>
-          <a:noFill/>
-          <a:ln/>
-        </p:spPr>
-        <p:txBody>
-          <a:bodyPr wrap="square" rtlCol="0" anchor="ctr"/>
-          <a:lstStyle/>
-          <a:p>
-            <a:pPr algn="r" indent="0" marL="0">
-              <a:buNone/>
-            </a:pPr>
-            <a:r>
-              <a:rPr lang="en-US" sz="1000" dirty="0">
+          <p:cNvPr id="25" name="Slide Number Placeholder 0"/>
+          <p:cNvSpPr>
+            <a:spLocks noGrp="1"/>
+          </p:cNvSpPr>
+          <p:nvPr>
+            <p:ph type="sldNum" sz="quarter" idx="4294967295"/>
+          </p:nvPr>
+        </p:nvSpPr>
+        <p:spPr>
+          <a:xfrm>
+            <a:off x="11277295" y="6492240"/>
+            <a:ext cx="548640" cy="274320"/>
+          </a:xfrm>
+          <a:prstGeom prst="rect">
+            <a:avLst/>
+          </a:prstGeom>
+          <a:extLst>
+            <a:ext uri="{C572A759-6A51-4108-AA02-DFA0A04FC94B}">
+              <ma14:wrappingTextBoxFlag xmlns:ma14="http://schemas.microsoft.com/office/mac/drawingml/2011/main" val="0"/>
+            </a:ext>
+          </a:extLst>
+        </p:spPr>
+        <p:txBody>
+          <a:bodyPr/>
+          <a:lstStyle>
+            <a:lvl1pPr>
+              <a:defRPr sz="1000">
                 <a:solidFill>
                   <a:srgbClr val="A8B2C8"/>
                 </a:solidFill>
-                <a:latin typeface="Calibri" pitchFamily="34" charset="0"/>
-                <a:ea typeface="Calibri" pitchFamily="34" charset="-122"/>
-                <a:cs typeface="Calibri" pitchFamily="34" charset="-120"/>
-              </a:rPr>
-              <a:t>{slide_num} / 14</a:t>
-            </a:r>
-            <a:endParaRPr lang="en-US" sz="1000" dirty="0"/>
+                <a:latin typeface="Calibri"/>
+                <a:ea typeface="Calibri"/>
+                <a:cs typeface="Calibri"/>
+              </a:defRPr>
+            </a:lvl1pPr>
+          </a:lstStyle>
+          <a:p>
+            <a:pPr algn="r"/>
+            <a:fld id="{F7021451-1387-4CA6-816F-3879F97B5CBC}" type="slidenum">
+              <a:rPr b="0" lang="en-US"/>
+              <a:t>1002</a:t>
+            </a:fld>
+            <a:endParaRPr lang="en-US"/>
           </a:p>
         </p:txBody>
       </p:sp>
@@ -1958,7 +1967,7 @@
                 <a:ea typeface="Calibri" pitchFamily="34" charset="-122"/>
                 <a:cs typeface="Calibri" pitchFamily="34" charset="-120"/>
               </a:rPr>
-              <a:t>Pariksha · परीक्षा · Every mark, earned.</a:t>
+              <a:t>Pariksha · Every mark, earned.</a:t>
             </a:r>
             <a:endParaRPr lang="en-US" sz="1000" dirty="0"/>
           </a:p>
@@ -1966,40 +1975,49 @@
       </p:sp>
       <p:sp>
         <p:nvSpPr>
-          <p:cNvPr id="5" name="Text 3"/>
-          <p:cNvSpPr/>
-          <p:nvPr/>
-        </p:nvSpPr>
-        <p:spPr>
-          <a:xfrm>
-            <a:off x="11094415" y="6492240"/>
-            <a:ext cx="731520" cy="274320"/>
-          </a:xfrm>
-          <a:prstGeom prst="rect">
-            <a:avLst/>
-          </a:prstGeom>
-          <a:noFill/>
-          <a:ln/>
-        </p:spPr>
-        <p:txBody>
-          <a:bodyPr wrap="square" rtlCol="0" anchor="ctr"/>
-          <a:lstStyle/>
-          <a:p>
-            <a:pPr algn="r" indent="0" marL="0">
-              <a:buNone/>
-            </a:pPr>
-            <a:r>
-              <a:rPr lang="en-US" sz="1000" dirty="0">
+          <p:cNvPr id="25" name="Slide Number Placeholder 0"/>
+          <p:cNvSpPr>
+            <a:spLocks noGrp="1"/>
+          </p:cNvSpPr>
+          <p:nvPr>
+            <p:ph type="sldNum" sz="quarter" idx="4294967295"/>
+          </p:nvPr>
+        </p:nvSpPr>
+        <p:spPr>
+          <a:xfrm>
+            <a:off x="11277295" y="6492240"/>
+            <a:ext cx="548640" cy="274320"/>
+          </a:xfrm>
+          <a:prstGeom prst="rect">
+            <a:avLst/>
+          </a:prstGeom>
+          <a:extLst>
+            <a:ext uri="{C572A759-6A51-4108-AA02-DFA0A04FC94B}">
+              <ma14:wrappingTextBoxFlag xmlns:ma14="http://schemas.microsoft.com/office/mac/drawingml/2011/main" val="0"/>
+            </a:ext>
+          </a:extLst>
+        </p:spPr>
+        <p:txBody>
+          <a:bodyPr/>
+          <a:lstStyle>
+            <a:lvl1pPr>
+              <a:defRPr sz="1000">
                 <a:solidFill>
                   <a:srgbClr val="64748B"/>
                 </a:solidFill>
-                <a:latin typeface="Calibri" pitchFamily="34" charset="0"/>
-                <a:ea typeface="Calibri" pitchFamily="34" charset="-122"/>
-                <a:cs typeface="Calibri" pitchFamily="34" charset="-120"/>
-              </a:rPr>
-              <a:t>{slide_num} / 14</a:t>
-            </a:r>
-            <a:endParaRPr lang="en-US" sz="1000" dirty="0"/>
+                <a:latin typeface="Calibri"/>
+                <a:ea typeface="Calibri"/>
+                <a:cs typeface="Calibri"/>
+              </a:defRPr>
+            </a:lvl1pPr>
+          </a:lstStyle>
+          <a:p>
+            <a:pPr algn="r"/>
+            <a:fld id="{F7021451-1387-4CA6-816F-3879F97B5CBC}" type="slidenum">
+              <a:rPr b="0" lang="en-US"/>
+              <a:t>1003</a:t>
+            </a:fld>
+            <a:endParaRPr lang="en-US"/>
           </a:p>
         </p:txBody>
       </p:sp>
@@ -2028,6 +2046,54 @@
           <a:chExt cx="0" cy="0"/>
         </a:xfrm>
       </p:grpSpPr>
+      <p:sp>
+        <p:nvSpPr>
+          <p:cNvPr id="25" name="Slide Number Placeholder 0"/>
+          <p:cNvSpPr>
+            <a:spLocks noGrp="1"/>
+          </p:cNvSpPr>
+          <p:nvPr>
+            <p:ph type="sldNum" sz="quarter" idx="4294967295"/>
+          </p:nvPr>
+        </p:nvSpPr>
+        <p:spPr>
+          <a:xfrm>
+            <a:off x="11277295" y="6492240"/>
+            <a:ext cx="548640" cy="274320"/>
+          </a:xfrm>
+          <a:prstGeom prst="rect">
+            <a:avLst/>
+          </a:prstGeom>
+          <a:extLst>
+            <a:ext uri="{C572A759-6A51-4108-AA02-DFA0A04FC94B}">
+              <ma14:wrappingTextBoxFlag xmlns:ma14="http://schemas.microsoft.com/office/mac/drawingml/2011/main" val="0"/>
+            </a:ext>
+          </a:extLst>
+        </p:spPr>
+        <p:txBody>
+          <a:bodyPr/>
+          <a:lstStyle>
+            <a:lvl1pPr>
+              <a:defRPr sz="1000">
+                <a:solidFill>
+                  <a:srgbClr val="A8B2C8"/>
+                </a:solidFill>
+                <a:latin typeface="Calibri"/>
+                <a:ea typeface="Calibri"/>
+                <a:cs typeface="Calibri"/>
+              </a:defRPr>
+            </a:lvl1pPr>
+          </a:lstStyle>
+          <a:p>
+            <a:pPr algn="r"/>
+            <a:fld id="{F7021451-1387-4CA6-816F-3879F97B5CBC}" type="slidenum">
+              <a:rPr b="0" lang="en-US"/>
+              <a:t>null</a:t>
+            </a:fld>
+            <a:endParaRPr lang="en-US"/>
+          </a:p>
+        </p:txBody>
+      </p:sp>
     </p:spTree>
   </p:cSld>
   <p:clrMap bg1="lt1" tx1="dk1" bg2="lt2" tx2="dk2" accent1="accent1" accent2="accent2" accent3="accent3" accent4="accent4" accent5="accent5" accent6="accent6" hlink="hlink" folHlink="folHlink"/>
@@ -2714,6 +2780,54 @@
           </a:p>
         </p:txBody>
       </p:sp>
+      <p:sp>
+        <p:nvSpPr>
+          <p:cNvPr id="25" name="Slide Number Placeholder 0"/>
+          <p:cNvSpPr>
+            <a:spLocks noGrp="1"/>
+          </p:cNvSpPr>
+          <p:nvPr>
+            <p:ph type="sldNum" sz="quarter" idx="4294967295"/>
+          </p:nvPr>
+        </p:nvSpPr>
+        <p:spPr>
+          <a:xfrm>
+            <a:off x="11277295" y="6492240"/>
+            <a:ext cx="548640" cy="274320"/>
+          </a:xfrm>
+          <a:prstGeom prst="rect">
+            <a:avLst/>
+          </a:prstGeom>
+          <a:extLst>
+            <a:ext uri="{C572A759-6A51-4108-AA02-DFA0A04FC94B}">
+              <ma14:wrappingTextBoxFlag xmlns:ma14="http://schemas.microsoft.com/office/mac/drawingml/2011/main" val="0"/>
+            </a:ext>
+          </a:extLst>
+        </p:spPr>
+        <p:txBody>
+          <a:bodyPr/>
+          <a:lstStyle>
+            <a:lvl1pPr>
+              <a:defRPr sz="1000">
+                <a:solidFill>
+                  <a:srgbClr val="A8B2C8"/>
+                </a:solidFill>
+                <a:latin typeface="Calibri"/>
+                <a:ea typeface="Calibri"/>
+                <a:cs typeface="Calibri"/>
+              </a:defRPr>
+            </a:lvl1pPr>
+          </a:lstStyle>
+          <a:p>
+            <a:pPr algn="r"/>
+            <a:fld id="{F7021451-1387-4CA6-816F-3879F97B5CBC}" type="slidenum">
+              <a:rPr b="0" lang="en-US"/>
+              <a:t>1</a:t>
+            </a:fld>
+            <a:endParaRPr lang="en-US"/>
+          </a:p>
+        </p:txBody>
+      </p:sp>
     </p:spTree>
   </p:cSld>
   <p:clrMapOvr>
@@ -3663,6 +3777,54 @@
           </a:p>
         </p:txBody>
       </p:sp>
+      <p:sp>
+        <p:nvSpPr>
+          <p:cNvPr id="25" name="Slide Number Placeholder 0"/>
+          <p:cNvSpPr>
+            <a:spLocks noGrp="1"/>
+          </p:cNvSpPr>
+          <p:nvPr>
+            <p:ph type="sldNum" sz="quarter" idx="4294967295"/>
+          </p:nvPr>
+        </p:nvSpPr>
+        <p:spPr>
+          <a:xfrm>
+            <a:off x="11277295" y="6492240"/>
+            <a:ext cx="548640" cy="274320"/>
+          </a:xfrm>
+          <a:prstGeom prst="rect">
+            <a:avLst/>
+          </a:prstGeom>
+          <a:extLst>
+            <a:ext uri="{C572A759-6A51-4108-AA02-DFA0A04FC94B}">
+              <ma14:wrappingTextBoxFlag xmlns:ma14="http://schemas.microsoft.com/office/mac/drawingml/2011/main" val="0"/>
+            </a:ext>
+          </a:extLst>
+        </p:spPr>
+        <p:txBody>
+          <a:bodyPr/>
+          <a:lstStyle>
+            <a:lvl1pPr>
+              <a:defRPr sz="1000">
+                <a:solidFill>
+                  <a:srgbClr val="64748B"/>
+                </a:solidFill>
+                <a:latin typeface="Calibri"/>
+                <a:ea typeface="Calibri"/>
+                <a:cs typeface="Calibri"/>
+              </a:defRPr>
+            </a:lvl1pPr>
+          </a:lstStyle>
+          <a:p>
+            <a:pPr algn="r"/>
+            <a:fld id="{F7021451-1387-4CA6-816F-3879F97B5CBC}" type="slidenum">
+              <a:rPr b="0" lang="en-US"/>
+              <a:t>10</a:t>
+            </a:fld>
+            <a:endParaRPr lang="en-US"/>
+          </a:p>
+        </p:txBody>
+      </p:sp>
     </p:spTree>
   </p:cSld>
   <p:clrMapOvr>
@@ -3850,6 +4012,54 @@
           </a:p>
         </p:txBody>
       </p:sp>
+      <p:sp>
+        <p:nvSpPr>
+          <p:cNvPr id="25" name="Slide Number Placeholder 0"/>
+          <p:cNvSpPr>
+            <a:spLocks noGrp="1"/>
+          </p:cNvSpPr>
+          <p:nvPr>
+            <p:ph type="sldNum" sz="quarter" idx="4294967295"/>
+          </p:nvPr>
+        </p:nvSpPr>
+        <p:spPr>
+          <a:xfrm>
+            <a:off x="11277295" y="6492240"/>
+            <a:ext cx="548640" cy="274320"/>
+          </a:xfrm>
+          <a:prstGeom prst="rect">
+            <a:avLst/>
+          </a:prstGeom>
+          <a:extLst>
+            <a:ext uri="{C572A759-6A51-4108-AA02-DFA0A04FC94B}">
+              <ma14:wrappingTextBoxFlag xmlns:ma14="http://schemas.microsoft.com/office/mac/drawingml/2011/main" val="0"/>
+            </a:ext>
+          </a:extLst>
+        </p:spPr>
+        <p:txBody>
+          <a:bodyPr/>
+          <a:lstStyle>
+            <a:lvl1pPr>
+              <a:defRPr sz="1000">
+                <a:solidFill>
+                  <a:srgbClr val="64748B"/>
+                </a:solidFill>
+                <a:latin typeface="Calibri"/>
+                <a:ea typeface="Calibri"/>
+                <a:cs typeface="Calibri"/>
+              </a:defRPr>
+            </a:lvl1pPr>
+          </a:lstStyle>
+          <a:p>
+            <a:pPr algn="r"/>
+            <a:fld id="{F7021451-1387-4CA6-816F-3879F97B5CBC}" type="slidenum">
+              <a:rPr b="0" lang="en-US"/>
+              <a:t>11</a:t>
+            </a:fld>
+            <a:endParaRPr lang="en-US"/>
+          </a:p>
+        </p:txBody>
+      </p:sp>
     </p:spTree>
   </p:cSld>
   <p:clrMapOvr>
@@ -4637,6 +4847,54 @@
           </a:p>
         </p:txBody>
       </p:sp>
+      <p:sp>
+        <p:nvSpPr>
+          <p:cNvPr id="25" name="Slide Number Placeholder 0"/>
+          <p:cNvSpPr>
+            <a:spLocks noGrp="1"/>
+          </p:cNvSpPr>
+          <p:nvPr>
+            <p:ph type="sldNum" sz="quarter" idx="4294967295"/>
+          </p:nvPr>
+        </p:nvSpPr>
+        <p:spPr>
+          <a:xfrm>
+            <a:off x="11277295" y="6492240"/>
+            <a:ext cx="548640" cy="274320"/>
+          </a:xfrm>
+          <a:prstGeom prst="rect">
+            <a:avLst/>
+          </a:prstGeom>
+          <a:extLst>
+            <a:ext uri="{C572A759-6A51-4108-AA02-DFA0A04FC94B}">
+              <ma14:wrappingTextBoxFlag xmlns:ma14="http://schemas.microsoft.com/office/mac/drawingml/2011/main" val="0"/>
+            </a:ext>
+          </a:extLst>
+        </p:spPr>
+        <p:txBody>
+          <a:bodyPr/>
+          <a:lstStyle>
+            <a:lvl1pPr>
+              <a:defRPr sz="1000">
+                <a:solidFill>
+                  <a:srgbClr val="A8B2C8"/>
+                </a:solidFill>
+                <a:latin typeface="Calibri"/>
+                <a:ea typeface="Calibri"/>
+                <a:cs typeface="Calibri"/>
+              </a:defRPr>
+            </a:lvl1pPr>
+          </a:lstStyle>
+          <a:p>
+            <a:pPr algn="r"/>
+            <a:fld id="{F7021451-1387-4CA6-816F-3879F97B5CBC}" type="slidenum">
+              <a:rPr b="0" lang="en-US"/>
+              <a:t>12</a:t>
+            </a:fld>
+            <a:endParaRPr lang="en-US"/>
+          </a:p>
+        </p:txBody>
+      </p:sp>
     </p:spTree>
   </p:cSld>
   <p:clrMapOvr>
@@ -4967,9 +5225,57 @@
                   </a:extLst>
                 </a:hlinkClick>
               </a:rPr>
-              <a:t>🔗 pariksha-platform.lovable.app</a:t>
+              <a:t>pariksha-platform.lovable.app</a:t>
             </a:r>
             <a:endParaRPr lang="en-US" sz="1300" dirty="0"/>
+          </a:p>
+        </p:txBody>
+      </p:sp>
+      <p:sp>
+        <p:nvSpPr>
+          <p:cNvPr id="25" name="Slide Number Placeholder 0"/>
+          <p:cNvSpPr>
+            <a:spLocks noGrp="1"/>
+          </p:cNvSpPr>
+          <p:nvPr>
+            <p:ph type="sldNum" sz="quarter" idx="4294967295"/>
+          </p:nvPr>
+        </p:nvSpPr>
+        <p:spPr>
+          <a:xfrm>
+            <a:off x="11277295" y="6492240"/>
+            <a:ext cx="548640" cy="274320"/>
+          </a:xfrm>
+          <a:prstGeom prst="rect">
+            <a:avLst/>
+          </a:prstGeom>
+          <a:extLst>
+            <a:ext uri="{C572A759-6A51-4108-AA02-DFA0A04FC94B}">
+              <ma14:wrappingTextBoxFlag xmlns:ma14="http://schemas.microsoft.com/office/mac/drawingml/2011/main" val="0"/>
+            </a:ext>
+          </a:extLst>
+        </p:spPr>
+        <p:txBody>
+          <a:bodyPr/>
+          <a:lstStyle>
+            <a:lvl1pPr>
+              <a:defRPr sz="1000">
+                <a:solidFill>
+                  <a:srgbClr val="A8B2C8"/>
+                </a:solidFill>
+                <a:latin typeface="Calibri"/>
+                <a:ea typeface="Calibri"/>
+                <a:cs typeface="Calibri"/>
+              </a:defRPr>
+            </a:lvl1pPr>
+          </a:lstStyle>
+          <a:p>
+            <a:pPr algn="r"/>
+            <a:fld id="{F7021451-1387-4CA6-816F-3879F97B5CBC}" type="slidenum">
+              <a:rPr b="0" lang="en-US"/>
+              <a:t>13</a:t>
+            </a:fld>
+            <a:endParaRPr lang="en-US"/>
           </a:p>
         </p:txBody>
       </p:sp>
@@ -5803,6 +6109,54 @@
           </a:p>
         </p:txBody>
       </p:sp>
+      <p:sp>
+        <p:nvSpPr>
+          <p:cNvPr id="25" name="Slide Number Placeholder 0"/>
+          <p:cNvSpPr>
+            <a:spLocks noGrp="1"/>
+          </p:cNvSpPr>
+          <p:nvPr>
+            <p:ph type="sldNum" sz="quarter" idx="4294967295"/>
+          </p:nvPr>
+        </p:nvSpPr>
+        <p:spPr>
+          <a:xfrm>
+            <a:off x="11277295" y="6492240"/>
+            <a:ext cx="548640" cy="274320"/>
+          </a:xfrm>
+          <a:prstGeom prst="rect">
+            <a:avLst/>
+          </a:prstGeom>
+          <a:extLst>
+            <a:ext uri="{C572A759-6A51-4108-AA02-DFA0A04FC94B}">
+              <ma14:wrappingTextBoxFlag xmlns:ma14="http://schemas.microsoft.com/office/mac/drawingml/2011/main" val="0"/>
+            </a:ext>
+          </a:extLst>
+        </p:spPr>
+        <p:txBody>
+          <a:bodyPr/>
+          <a:lstStyle>
+            <a:lvl1pPr>
+              <a:defRPr sz="1000">
+                <a:solidFill>
+                  <a:srgbClr val="64748B"/>
+                </a:solidFill>
+                <a:latin typeface="Calibri"/>
+                <a:ea typeface="Calibri"/>
+                <a:cs typeface="Calibri"/>
+              </a:defRPr>
+            </a:lvl1pPr>
+          </a:lstStyle>
+          <a:p>
+            <a:pPr algn="r"/>
+            <a:fld id="{F7021451-1387-4CA6-816F-3879F97B5CBC}" type="slidenum">
+              <a:rPr b="0" lang="en-US"/>
+              <a:t>14</a:t>
+            </a:fld>
+            <a:endParaRPr lang="en-US"/>
+          </a:p>
+        </p:txBody>
+      </p:sp>
     </p:spTree>
   </p:cSld>
   <p:clrMapOvr>
@@ -6734,6 +7088,54 @@
           </a:p>
         </p:txBody>
       </p:sp>
+      <p:sp>
+        <p:nvSpPr>
+          <p:cNvPr id="25" name="Slide Number Placeholder 0"/>
+          <p:cNvSpPr>
+            <a:spLocks noGrp="1"/>
+          </p:cNvSpPr>
+          <p:nvPr>
+            <p:ph type="sldNum" sz="quarter" idx="4294967295"/>
+          </p:nvPr>
+        </p:nvSpPr>
+        <p:spPr>
+          <a:xfrm>
+            <a:off x="11277295" y="6492240"/>
+            <a:ext cx="548640" cy="274320"/>
+          </a:xfrm>
+          <a:prstGeom prst="rect">
+            <a:avLst/>
+          </a:prstGeom>
+          <a:extLst>
+            <a:ext uri="{C572A759-6A51-4108-AA02-DFA0A04FC94B}">
+              <ma14:wrappingTextBoxFlag xmlns:ma14="http://schemas.microsoft.com/office/mac/drawingml/2011/main" val="0"/>
+            </a:ext>
+          </a:extLst>
+        </p:spPr>
+        <p:txBody>
+          <a:bodyPr/>
+          <a:lstStyle>
+            <a:lvl1pPr>
+              <a:defRPr sz="1000">
+                <a:solidFill>
+                  <a:srgbClr val="64748B"/>
+                </a:solidFill>
+                <a:latin typeface="Calibri"/>
+                <a:ea typeface="Calibri"/>
+                <a:cs typeface="Calibri"/>
+              </a:defRPr>
+            </a:lvl1pPr>
+          </a:lstStyle>
+          <a:p>
+            <a:pPr algn="r"/>
+            <a:fld id="{F7021451-1387-4CA6-816F-3879F97B5CBC}" type="slidenum">
+              <a:rPr b="0" lang="en-US"/>
+              <a:t>2</a:t>
+            </a:fld>
+            <a:endParaRPr lang="en-US"/>
+          </a:p>
+        </p:txBody>
+      </p:sp>
     </p:spTree>
   </p:cSld>
   <p:clrMapOvr>
@@ -7365,6 +7767,54 @@
           </a:p>
         </p:txBody>
       </p:sp>
+      <p:sp>
+        <p:nvSpPr>
+          <p:cNvPr id="25" name="Slide Number Placeholder 0"/>
+          <p:cNvSpPr>
+            <a:spLocks noGrp="1"/>
+          </p:cNvSpPr>
+          <p:nvPr>
+            <p:ph type="sldNum" sz="quarter" idx="4294967295"/>
+          </p:nvPr>
+        </p:nvSpPr>
+        <p:spPr>
+          <a:xfrm>
+            <a:off x="11277295" y="6492240"/>
+            <a:ext cx="548640" cy="274320"/>
+          </a:xfrm>
+          <a:prstGeom prst="rect">
+            <a:avLst/>
+          </a:prstGeom>
+          <a:extLst>
+            <a:ext uri="{C572A759-6A51-4108-AA02-DFA0A04FC94B}">
+              <ma14:wrappingTextBoxFlag xmlns:ma14="http://schemas.microsoft.com/office/mac/drawingml/2011/main" val="0"/>
+            </a:ext>
+          </a:extLst>
+        </p:spPr>
+        <p:txBody>
+          <a:bodyPr/>
+          <a:lstStyle>
+            <a:lvl1pPr>
+              <a:defRPr sz="1000">
+                <a:solidFill>
+                  <a:srgbClr val="A8B2C8"/>
+                </a:solidFill>
+                <a:latin typeface="Calibri"/>
+                <a:ea typeface="Calibri"/>
+                <a:cs typeface="Calibri"/>
+              </a:defRPr>
+            </a:lvl1pPr>
+          </a:lstStyle>
+          <a:p>
+            <a:pPr algn="r"/>
+            <a:fld id="{F7021451-1387-4CA6-816F-3879F97B5CBC}" type="slidenum">
+              <a:rPr b="0" lang="en-US"/>
+              <a:t>3</a:t>
+            </a:fld>
+            <a:endParaRPr lang="en-US"/>
+          </a:p>
+        </p:txBody>
+      </p:sp>
     </p:spTree>
   </p:cSld>
   <p:clrMapOvr>
@@ -8464,6 +8914,54 @@
           </a:p>
         </p:txBody>
       </p:sp>
+      <p:sp>
+        <p:nvSpPr>
+          <p:cNvPr id="25" name="Slide Number Placeholder 0"/>
+          <p:cNvSpPr>
+            <a:spLocks noGrp="1"/>
+          </p:cNvSpPr>
+          <p:nvPr>
+            <p:ph type="sldNum" sz="quarter" idx="4294967295"/>
+          </p:nvPr>
+        </p:nvSpPr>
+        <p:spPr>
+          <a:xfrm>
+            <a:off x="11277295" y="6492240"/>
+            <a:ext cx="548640" cy="274320"/>
+          </a:xfrm>
+          <a:prstGeom prst="rect">
+            <a:avLst/>
+          </a:prstGeom>
+          <a:extLst>
+            <a:ext uri="{C572A759-6A51-4108-AA02-DFA0A04FC94B}">
+              <ma14:wrappingTextBoxFlag xmlns:ma14="http://schemas.microsoft.com/office/mac/drawingml/2011/main" val="0"/>
+            </a:ext>
+          </a:extLst>
+        </p:spPr>
+        <p:txBody>
+          <a:bodyPr/>
+          <a:lstStyle>
+            <a:lvl1pPr>
+              <a:defRPr sz="1000">
+                <a:solidFill>
+                  <a:srgbClr val="64748B"/>
+                </a:solidFill>
+                <a:latin typeface="Calibri"/>
+                <a:ea typeface="Calibri"/>
+                <a:cs typeface="Calibri"/>
+              </a:defRPr>
+            </a:lvl1pPr>
+          </a:lstStyle>
+          <a:p>
+            <a:pPr algn="r"/>
+            <a:fld id="{F7021451-1387-4CA6-816F-3879F97B5CBC}" type="slidenum">
+              <a:rPr b="0" lang="en-US"/>
+              <a:t>4</a:t>
+            </a:fld>
+            <a:endParaRPr lang="en-US"/>
+          </a:p>
+        </p:txBody>
+      </p:sp>
     </p:spTree>
   </p:cSld>
   <p:clrMapOvr>
@@ -8651,6 +9149,54 @@
           </a:ln>
         </p:spPr>
       </p:sp>
+      <p:sp>
+        <p:nvSpPr>
+          <p:cNvPr id="25" name="Slide Number Placeholder 0"/>
+          <p:cNvSpPr>
+            <a:spLocks noGrp="1"/>
+          </p:cNvSpPr>
+          <p:nvPr>
+            <p:ph type="sldNum" sz="quarter" idx="4294967295"/>
+          </p:nvPr>
+        </p:nvSpPr>
+        <p:spPr>
+          <a:xfrm>
+            <a:off x="11277295" y="6492240"/>
+            <a:ext cx="548640" cy="274320"/>
+          </a:xfrm>
+          <a:prstGeom prst="rect">
+            <a:avLst/>
+          </a:prstGeom>
+          <a:extLst>
+            <a:ext uri="{C572A759-6A51-4108-AA02-DFA0A04FC94B}">
+              <ma14:wrappingTextBoxFlag xmlns:ma14="http://schemas.microsoft.com/office/mac/drawingml/2011/main" val="0"/>
+            </a:ext>
+          </a:extLst>
+        </p:spPr>
+        <p:txBody>
+          <a:bodyPr/>
+          <a:lstStyle>
+            <a:lvl1pPr>
+              <a:defRPr sz="1000">
+                <a:solidFill>
+                  <a:srgbClr val="64748B"/>
+                </a:solidFill>
+                <a:latin typeface="Calibri"/>
+                <a:ea typeface="Calibri"/>
+                <a:cs typeface="Calibri"/>
+              </a:defRPr>
+            </a:lvl1pPr>
+          </a:lstStyle>
+          <a:p>
+            <a:pPr algn="r"/>
+            <a:fld id="{F7021451-1387-4CA6-816F-3879F97B5CBC}" type="slidenum">
+              <a:rPr b="0" lang="en-US"/>
+              <a:t>5</a:t>
+            </a:fld>
+            <a:endParaRPr lang="en-US"/>
+          </a:p>
+        </p:txBody>
+      </p:sp>
     </p:spTree>
   </p:cSld>
   <p:clrMapOvr>
@@ -9456,6 +10002,54 @@
           </a:p>
         </p:txBody>
       </p:sp>
+      <p:sp>
+        <p:nvSpPr>
+          <p:cNvPr id="25" name="Slide Number Placeholder 0"/>
+          <p:cNvSpPr>
+            <a:spLocks noGrp="1"/>
+          </p:cNvSpPr>
+          <p:nvPr>
+            <p:ph type="sldNum" sz="quarter" idx="4294967295"/>
+          </p:nvPr>
+        </p:nvSpPr>
+        <p:spPr>
+          <a:xfrm>
+            <a:off x="11277295" y="6492240"/>
+            <a:ext cx="548640" cy="274320"/>
+          </a:xfrm>
+          <a:prstGeom prst="rect">
+            <a:avLst/>
+          </a:prstGeom>
+          <a:extLst>
+            <a:ext uri="{C572A759-6A51-4108-AA02-DFA0A04FC94B}">
+              <ma14:wrappingTextBoxFlag xmlns:ma14="http://schemas.microsoft.com/office/mac/drawingml/2011/main" val="0"/>
+            </a:ext>
+          </a:extLst>
+        </p:spPr>
+        <p:txBody>
+          <a:bodyPr/>
+          <a:lstStyle>
+            <a:lvl1pPr>
+              <a:defRPr sz="1000">
+                <a:solidFill>
+                  <a:srgbClr val="A8B2C8"/>
+                </a:solidFill>
+                <a:latin typeface="Calibri"/>
+                <a:ea typeface="Calibri"/>
+                <a:cs typeface="Calibri"/>
+              </a:defRPr>
+            </a:lvl1pPr>
+          </a:lstStyle>
+          <a:p>
+            <a:pPr algn="r"/>
+            <a:fld id="{F7021451-1387-4CA6-816F-3879F97B5CBC}" type="slidenum">
+              <a:rPr b="0" lang="en-US"/>
+              <a:t>6</a:t>
+            </a:fld>
+            <a:endParaRPr lang="en-US"/>
+          </a:p>
+        </p:txBody>
+      </p:sp>
     </p:spTree>
   </p:cSld>
   <p:clrMapOvr>
@@ -10061,6 +10655,54 @@
           </a:p>
         </p:txBody>
       </p:sp>
+      <p:sp>
+        <p:nvSpPr>
+          <p:cNvPr id="25" name="Slide Number Placeholder 0"/>
+          <p:cNvSpPr>
+            <a:spLocks noGrp="1"/>
+          </p:cNvSpPr>
+          <p:nvPr>
+            <p:ph type="sldNum" sz="quarter" idx="4294967295"/>
+          </p:nvPr>
+        </p:nvSpPr>
+        <p:spPr>
+          <a:xfrm>
+            <a:off x="11277295" y="6492240"/>
+            <a:ext cx="548640" cy="274320"/>
+          </a:xfrm>
+          <a:prstGeom prst="rect">
+            <a:avLst/>
+          </a:prstGeom>
+          <a:extLst>
+            <a:ext uri="{C572A759-6A51-4108-AA02-DFA0A04FC94B}">
+              <ma14:wrappingTextBoxFlag xmlns:ma14="http://schemas.microsoft.com/office/mac/drawingml/2011/main" val="0"/>
+            </a:ext>
+          </a:extLst>
+        </p:spPr>
+        <p:txBody>
+          <a:bodyPr/>
+          <a:lstStyle>
+            <a:lvl1pPr>
+              <a:defRPr sz="1000">
+                <a:solidFill>
+                  <a:srgbClr val="64748B"/>
+                </a:solidFill>
+                <a:latin typeface="Calibri"/>
+                <a:ea typeface="Calibri"/>
+                <a:cs typeface="Calibri"/>
+              </a:defRPr>
+            </a:lvl1pPr>
+          </a:lstStyle>
+          <a:p>
+            <a:pPr algn="r"/>
+            <a:fld id="{F7021451-1387-4CA6-816F-3879F97B5CBC}" type="slidenum">
+              <a:rPr b="0" lang="en-US"/>
+              <a:t>7</a:t>
+            </a:fld>
+            <a:endParaRPr lang="en-US"/>
+          </a:p>
+        </p:txBody>
+      </p:sp>
     </p:spTree>
   </p:cSld>
   <p:clrMapOvr>
@@ -10914,6 +11556,54 @@
           </a:p>
         </p:txBody>
       </p:sp>
+      <p:sp>
+        <p:nvSpPr>
+          <p:cNvPr id="25" name="Slide Number Placeholder 0"/>
+          <p:cNvSpPr>
+            <a:spLocks noGrp="1"/>
+          </p:cNvSpPr>
+          <p:nvPr>
+            <p:ph type="sldNum" sz="quarter" idx="4294967295"/>
+          </p:nvPr>
+        </p:nvSpPr>
+        <p:spPr>
+          <a:xfrm>
+            <a:off x="11277295" y="6492240"/>
+            <a:ext cx="548640" cy="274320"/>
+          </a:xfrm>
+          <a:prstGeom prst="rect">
+            <a:avLst/>
+          </a:prstGeom>
+          <a:extLst>
+            <a:ext uri="{C572A759-6A51-4108-AA02-DFA0A04FC94B}">
+              <ma14:wrappingTextBoxFlag xmlns:ma14="http://schemas.microsoft.com/office/mac/drawingml/2011/main" val="0"/>
+            </a:ext>
+          </a:extLst>
+        </p:spPr>
+        <p:txBody>
+          <a:bodyPr/>
+          <a:lstStyle>
+            <a:lvl1pPr>
+              <a:defRPr sz="1000">
+                <a:solidFill>
+                  <a:srgbClr val="A8B2C8"/>
+                </a:solidFill>
+                <a:latin typeface="Calibri"/>
+                <a:ea typeface="Calibri"/>
+                <a:cs typeface="Calibri"/>
+              </a:defRPr>
+            </a:lvl1pPr>
+          </a:lstStyle>
+          <a:p>
+            <a:pPr algn="r"/>
+            <a:fld id="{F7021451-1387-4CA6-816F-3879F97B5CBC}" type="slidenum">
+              <a:rPr b="0" lang="en-US"/>
+              <a:t>8</a:t>
+            </a:fld>
+            <a:endParaRPr lang="en-US"/>
+          </a:p>
+        </p:txBody>
+      </p:sp>
     </p:spTree>
   </p:cSld>
   <p:clrMapOvr>
@@ -11668,6 +12358,54 @@
               <a:t>1M+ concurrent candidates · 10K RPS sustained · &lt;120ms p95 · 200+ centres in parallel</a:t>
             </a:r>
             <a:endParaRPr lang="en-US" sz="1200" dirty="0"/>
+          </a:p>
+        </p:txBody>
+      </p:sp>
+      <p:sp>
+        <p:nvSpPr>
+          <p:cNvPr id="25" name="Slide Number Placeholder 0"/>
+          <p:cNvSpPr>
+            <a:spLocks noGrp="1"/>
+          </p:cNvSpPr>
+          <p:nvPr>
+            <p:ph type="sldNum" sz="quarter" idx="4294967295"/>
+          </p:nvPr>
+        </p:nvSpPr>
+        <p:spPr>
+          <a:xfrm>
+            <a:off x="11277295" y="6492240"/>
+            <a:ext cx="548640" cy="274320"/>
+          </a:xfrm>
+          <a:prstGeom prst="rect">
+            <a:avLst/>
+          </a:prstGeom>
+          <a:extLst>
+            <a:ext uri="{C572A759-6A51-4108-AA02-DFA0A04FC94B}">
+              <ma14:wrappingTextBoxFlag xmlns:ma14="http://schemas.microsoft.com/office/mac/drawingml/2011/main" val="0"/>
+            </a:ext>
+          </a:extLst>
+        </p:spPr>
+        <p:txBody>
+          <a:bodyPr/>
+          <a:lstStyle>
+            <a:lvl1pPr>
+              <a:defRPr sz="1000">
+                <a:solidFill>
+                  <a:srgbClr val="64748B"/>
+                </a:solidFill>
+                <a:latin typeface="Calibri"/>
+                <a:ea typeface="Calibri"/>
+                <a:cs typeface="Calibri"/>
+              </a:defRPr>
+            </a:lvl1pPr>
+          </a:lstStyle>
+          <a:p>
+            <a:pPr algn="r"/>
+            <a:fld id="{F7021451-1387-4CA6-816F-3879F97B5CBC}" type="slidenum">
+              <a:rPr b="0" lang="en-US"/>
+              <a:t>9</a:t>
+            </a:fld>
+            <a:endParaRPr lang="en-US"/>
           </a:p>
         </p:txBody>
       </p:sp>

--- a/public/pariksha-far-away-hackathon.pptx
+++ b/public/pariksha-far-away-hackathon.pptx
@@ -14817,8 +14817,8 @@
         </p:nvSpPr>
         <p:spPr>
           <a:xfrm>
-            <a:off x="621792" y="2670048"/>
-            <a:ext cx="329184" cy="329184"/>
+            <a:off x="603504" y="2651760"/>
+            <a:ext cx="384048" cy="384048"/>
           </a:xfrm>
           <a:prstGeom prst="ellipse">
             <a:avLst/>
@@ -14842,8 +14842,8 @@
         </p:nvSpPr>
         <p:spPr>
           <a:xfrm>
-            <a:off x="621792" y="2670048"/>
-            <a:ext cx="329184" cy="329184"/>
+            <a:off x="603504" y="2651760"/>
+            <a:ext cx="384048" cy="384048"/>
           </a:xfrm>
           <a:prstGeom prst="rect">
             <a:avLst/>
@@ -14881,8 +14881,8 @@
         </p:nvSpPr>
         <p:spPr>
           <a:xfrm>
-            <a:off x="1051560" y="2542032"/>
-            <a:ext cx="3017520" cy="292608"/>
+            <a:off x="1097280" y="2542032"/>
+            <a:ext cx="2971800" cy="292608"/>
           </a:xfrm>
           <a:prstGeom prst="rect">
             <a:avLst/>
@@ -14920,8 +14920,8 @@
         </p:nvSpPr>
         <p:spPr>
           <a:xfrm>
-            <a:off x="1051560" y="2834640"/>
-            <a:ext cx="3017520" cy="365760"/>
+            <a:off x="1097280" y="2834640"/>
+            <a:ext cx="2971800" cy="365760"/>
           </a:xfrm>
           <a:prstGeom prst="rect">
             <a:avLst/>
@@ -14986,8 +14986,8 @@
         </p:nvSpPr>
         <p:spPr>
           <a:xfrm>
-            <a:off x="4535424" y="2670048"/>
-            <a:ext cx="329184" cy="329184"/>
+            <a:off x="4517136" y="2651760"/>
+            <a:ext cx="384048" cy="384048"/>
           </a:xfrm>
           <a:prstGeom prst="ellipse">
             <a:avLst/>
@@ -15011,8 +15011,8 @@
         </p:nvSpPr>
         <p:spPr>
           <a:xfrm>
-            <a:off x="4535424" y="2670048"/>
-            <a:ext cx="329184" cy="329184"/>
+            <a:off x="4517136" y="2651760"/>
+            <a:ext cx="384048" cy="384048"/>
           </a:xfrm>
           <a:prstGeom prst="rect">
             <a:avLst/>
@@ -15050,8 +15050,8 @@
         </p:nvSpPr>
         <p:spPr>
           <a:xfrm>
-            <a:off x="4965192" y="2542032"/>
-            <a:ext cx="3017520" cy="292608"/>
+            <a:off x="5010912" y="2542032"/>
+            <a:ext cx="2971800" cy="292608"/>
           </a:xfrm>
           <a:prstGeom prst="rect">
             <a:avLst/>
@@ -15089,8 +15089,8 @@
         </p:nvSpPr>
         <p:spPr>
           <a:xfrm>
-            <a:off x="4965192" y="2834640"/>
-            <a:ext cx="3017520" cy="365760"/>
+            <a:off x="5010912" y="2834640"/>
+            <a:ext cx="2971800" cy="365760"/>
           </a:xfrm>
           <a:prstGeom prst="rect">
             <a:avLst/>
@@ -15155,8 +15155,8 @@
         </p:nvSpPr>
         <p:spPr>
           <a:xfrm>
-            <a:off x="8449056" y="2670048"/>
-            <a:ext cx="329184" cy="329184"/>
+            <a:off x="8430768" y="2651760"/>
+            <a:ext cx="384048" cy="384048"/>
           </a:xfrm>
           <a:prstGeom prst="ellipse">
             <a:avLst/>
@@ -15180,8 +15180,8 @@
         </p:nvSpPr>
         <p:spPr>
           <a:xfrm>
-            <a:off x="8449056" y="2670048"/>
-            <a:ext cx="329184" cy="329184"/>
+            <a:off x="8430768" y="2651760"/>
+            <a:ext cx="384048" cy="384048"/>
           </a:xfrm>
           <a:prstGeom prst="rect">
             <a:avLst/>
@@ -15219,8 +15219,8 @@
         </p:nvSpPr>
         <p:spPr>
           <a:xfrm>
-            <a:off x="8878824" y="2542032"/>
-            <a:ext cx="3017520" cy="292608"/>
+            <a:off x="8924544" y="2542032"/>
+            <a:ext cx="2971800" cy="292608"/>
           </a:xfrm>
           <a:prstGeom prst="rect">
             <a:avLst/>
@@ -15258,8 +15258,8 @@
         </p:nvSpPr>
         <p:spPr>
           <a:xfrm>
-            <a:off x="8878824" y="2834640"/>
-            <a:ext cx="3017520" cy="365760"/>
+            <a:off x="8924544" y="2834640"/>
+            <a:ext cx="2971800" cy="365760"/>
           </a:xfrm>
           <a:prstGeom prst="rect">
             <a:avLst/>
@@ -15324,8 +15324,8 @@
         </p:nvSpPr>
         <p:spPr>
           <a:xfrm>
-            <a:off x="621792" y="3630168"/>
-            <a:ext cx="329184" cy="329184"/>
+            <a:off x="603504" y="3611880"/>
+            <a:ext cx="384048" cy="384048"/>
           </a:xfrm>
           <a:prstGeom prst="ellipse">
             <a:avLst/>
@@ -15349,8 +15349,8 @@
         </p:nvSpPr>
         <p:spPr>
           <a:xfrm>
-            <a:off x="621792" y="3630168"/>
-            <a:ext cx="329184" cy="329184"/>
+            <a:off x="603504" y="3611880"/>
+            <a:ext cx="384048" cy="384048"/>
           </a:xfrm>
           <a:prstGeom prst="rect">
             <a:avLst/>
@@ -15388,8 +15388,8 @@
         </p:nvSpPr>
         <p:spPr>
           <a:xfrm>
-            <a:off x="1051560" y="3502152"/>
-            <a:ext cx="3017520" cy="292608"/>
+            <a:off x="1097280" y="3502152"/>
+            <a:ext cx="2971800" cy="292608"/>
           </a:xfrm>
           <a:prstGeom prst="rect">
             <a:avLst/>
@@ -15427,8 +15427,8 @@
         </p:nvSpPr>
         <p:spPr>
           <a:xfrm>
-            <a:off x="1051560" y="3794760"/>
-            <a:ext cx="3017520" cy="365760"/>
+            <a:off x="1097280" y="3794760"/>
+            <a:ext cx="2971800" cy="365760"/>
           </a:xfrm>
           <a:prstGeom prst="rect">
             <a:avLst/>
@@ -15493,8 +15493,8 @@
         </p:nvSpPr>
         <p:spPr>
           <a:xfrm>
-            <a:off x="4535424" y="3630168"/>
-            <a:ext cx="329184" cy="329184"/>
+            <a:off x="4517136" y="3611880"/>
+            <a:ext cx="384048" cy="384048"/>
           </a:xfrm>
           <a:prstGeom prst="ellipse">
             <a:avLst/>
@@ -15518,8 +15518,8 @@
         </p:nvSpPr>
         <p:spPr>
           <a:xfrm>
-            <a:off x="4535424" y="3630168"/>
-            <a:ext cx="329184" cy="329184"/>
+            <a:off x="4517136" y="3611880"/>
+            <a:ext cx="384048" cy="384048"/>
           </a:xfrm>
           <a:prstGeom prst="rect">
             <a:avLst/>
@@ -15557,8 +15557,8 @@
         </p:nvSpPr>
         <p:spPr>
           <a:xfrm>
-            <a:off x="4965192" y="3502152"/>
-            <a:ext cx="3017520" cy="292608"/>
+            <a:off x="5010912" y="3502152"/>
+            <a:ext cx="2971800" cy="292608"/>
           </a:xfrm>
           <a:prstGeom prst="rect">
             <a:avLst/>
@@ -15596,8 +15596,8 @@
         </p:nvSpPr>
         <p:spPr>
           <a:xfrm>
-            <a:off x="4965192" y="3794760"/>
-            <a:ext cx="3017520" cy="365760"/>
+            <a:off x="5010912" y="3794760"/>
+            <a:ext cx="2971800" cy="365760"/>
           </a:xfrm>
           <a:prstGeom prst="rect">
             <a:avLst/>
@@ -15662,8 +15662,8 @@
         </p:nvSpPr>
         <p:spPr>
           <a:xfrm>
-            <a:off x="8449056" y="3630168"/>
-            <a:ext cx="329184" cy="329184"/>
+            <a:off x="8430768" y="3611880"/>
+            <a:ext cx="384048" cy="384048"/>
           </a:xfrm>
           <a:prstGeom prst="ellipse">
             <a:avLst/>
@@ -15687,8 +15687,8 @@
         </p:nvSpPr>
         <p:spPr>
           <a:xfrm>
-            <a:off x="8449056" y="3630168"/>
-            <a:ext cx="329184" cy="329184"/>
+            <a:off x="8430768" y="3611880"/>
+            <a:ext cx="384048" cy="384048"/>
           </a:xfrm>
           <a:prstGeom prst="rect">
             <a:avLst/>
@@ -15726,8 +15726,8 @@
         </p:nvSpPr>
         <p:spPr>
           <a:xfrm>
-            <a:off x="8878824" y="3502152"/>
-            <a:ext cx="3017520" cy="292608"/>
+            <a:off x="8924544" y="3502152"/>
+            <a:ext cx="2971800" cy="292608"/>
           </a:xfrm>
           <a:prstGeom prst="rect">
             <a:avLst/>
@@ -15765,8 +15765,8 @@
         </p:nvSpPr>
         <p:spPr>
           <a:xfrm>
-            <a:off x="8878824" y="3794760"/>
-            <a:ext cx="3017520" cy="365760"/>
+            <a:off x="8924544" y="3794760"/>
+            <a:ext cx="2971800" cy="365760"/>
           </a:xfrm>
           <a:prstGeom prst="rect">
             <a:avLst/>
@@ -15831,8 +15831,8 @@
         </p:nvSpPr>
         <p:spPr>
           <a:xfrm>
-            <a:off x="621792" y="4590288"/>
-            <a:ext cx="329184" cy="329184"/>
+            <a:off x="603504" y="4572000"/>
+            <a:ext cx="384048" cy="384048"/>
           </a:xfrm>
           <a:prstGeom prst="ellipse">
             <a:avLst/>
@@ -15856,8 +15856,8 @@
         </p:nvSpPr>
         <p:spPr>
           <a:xfrm>
-            <a:off x="621792" y="4590288"/>
-            <a:ext cx="329184" cy="329184"/>
+            <a:off x="603504" y="4572000"/>
+            <a:ext cx="384048" cy="384048"/>
           </a:xfrm>
           <a:prstGeom prst="rect">
             <a:avLst/>
@@ -15895,8 +15895,8 @@
         </p:nvSpPr>
         <p:spPr>
           <a:xfrm>
-            <a:off x="1051560" y="4462272"/>
-            <a:ext cx="3017520" cy="292608"/>
+            <a:off x="1097280" y="4462272"/>
+            <a:ext cx="2971800" cy="292608"/>
           </a:xfrm>
           <a:prstGeom prst="rect">
             <a:avLst/>
@@ -15934,8 +15934,8 @@
         </p:nvSpPr>
         <p:spPr>
           <a:xfrm>
-            <a:off x="1051560" y="4754880"/>
-            <a:ext cx="3017520" cy="365760"/>
+            <a:off x="1097280" y="4754880"/>
+            <a:ext cx="2971800" cy="365760"/>
           </a:xfrm>
           <a:prstGeom prst="rect">
             <a:avLst/>
@@ -16000,8 +16000,8 @@
         </p:nvSpPr>
         <p:spPr>
           <a:xfrm>
-            <a:off x="4535424" y="4590288"/>
-            <a:ext cx="329184" cy="329184"/>
+            <a:off x="4517136" y="4572000"/>
+            <a:ext cx="384048" cy="384048"/>
           </a:xfrm>
           <a:prstGeom prst="ellipse">
             <a:avLst/>
@@ -16025,8 +16025,8 @@
         </p:nvSpPr>
         <p:spPr>
           <a:xfrm>
-            <a:off x="4535424" y="4590288"/>
-            <a:ext cx="329184" cy="329184"/>
+            <a:off x="4517136" y="4572000"/>
+            <a:ext cx="384048" cy="384048"/>
           </a:xfrm>
           <a:prstGeom prst="rect">
             <a:avLst/>
@@ -16064,8 +16064,8 @@
         </p:nvSpPr>
         <p:spPr>
           <a:xfrm>
-            <a:off x="4965192" y="4462272"/>
-            <a:ext cx="3017520" cy="292608"/>
+            <a:off x="5010912" y="4462272"/>
+            <a:ext cx="2971800" cy="292608"/>
           </a:xfrm>
           <a:prstGeom prst="rect">
             <a:avLst/>
@@ -16103,8 +16103,8 @@
         </p:nvSpPr>
         <p:spPr>
           <a:xfrm>
-            <a:off x="4965192" y="4754880"/>
-            <a:ext cx="3017520" cy="365760"/>
+            <a:off x="5010912" y="4754880"/>
+            <a:ext cx="2971800" cy="365760"/>
           </a:xfrm>
           <a:prstGeom prst="rect">
             <a:avLst/>
@@ -16169,8 +16169,8 @@
         </p:nvSpPr>
         <p:spPr>
           <a:xfrm>
-            <a:off x="8449056" y="4590288"/>
-            <a:ext cx="329184" cy="329184"/>
+            <a:off x="8430768" y="4572000"/>
+            <a:ext cx="384048" cy="384048"/>
           </a:xfrm>
           <a:prstGeom prst="ellipse">
             <a:avLst/>
@@ -16194,8 +16194,8 @@
         </p:nvSpPr>
         <p:spPr>
           <a:xfrm>
-            <a:off x="8449056" y="4590288"/>
-            <a:ext cx="329184" cy="329184"/>
+            <a:off x="8430768" y="4572000"/>
+            <a:ext cx="384048" cy="384048"/>
           </a:xfrm>
           <a:prstGeom prst="rect">
             <a:avLst/>
@@ -16233,8 +16233,8 @@
         </p:nvSpPr>
         <p:spPr>
           <a:xfrm>
-            <a:off x="8878824" y="4462272"/>
-            <a:ext cx="3017520" cy="292608"/>
+            <a:off x="8924544" y="4462272"/>
+            <a:ext cx="2971800" cy="292608"/>
           </a:xfrm>
           <a:prstGeom prst="rect">
             <a:avLst/>
@@ -16272,8 +16272,8 @@
         </p:nvSpPr>
         <p:spPr>
           <a:xfrm>
-            <a:off x="8878824" y="4754880"/>
-            <a:ext cx="3017520" cy="365760"/>
+            <a:off x="8924544" y="4754880"/>
+            <a:ext cx="2971800" cy="365760"/>
           </a:xfrm>
           <a:prstGeom prst="rect">
             <a:avLst/>
@@ -16338,8 +16338,8 @@
         </p:nvSpPr>
         <p:spPr>
           <a:xfrm>
-            <a:off x="621792" y="5550408"/>
-            <a:ext cx="329184" cy="329184"/>
+            <a:off x="603504" y="5532120"/>
+            <a:ext cx="384048" cy="384048"/>
           </a:xfrm>
           <a:prstGeom prst="ellipse">
             <a:avLst/>
@@ -16363,8 +16363,8 @@
         </p:nvSpPr>
         <p:spPr>
           <a:xfrm>
-            <a:off x="621792" y="5550408"/>
-            <a:ext cx="329184" cy="329184"/>
+            <a:off x="603504" y="5532120"/>
+            <a:ext cx="384048" cy="384048"/>
           </a:xfrm>
           <a:prstGeom prst="rect">
             <a:avLst/>
@@ -16380,7 +16380,7 @@
               <a:buNone/>
             </a:pPr>
             <a:r>
-              <a:rPr lang="en-US" sz="1100" b="1" dirty="0">
+              <a:rPr lang="en-US" sz="1000" b="1" dirty="0">
                 <a:solidFill>
                   <a:srgbClr val="FFFFFF"/>
                 </a:solidFill>
@@ -16390,7 +16390,7 @@
               </a:rPr>
               <a:t>10</a:t>
             </a:r>
-            <a:endParaRPr lang="en-US" sz="1100" dirty="0"/>
+            <a:endParaRPr lang="en-US" sz="1000" dirty="0"/>
           </a:p>
         </p:txBody>
       </p:sp>
@@ -16402,8 +16402,8 @@
         </p:nvSpPr>
         <p:spPr>
           <a:xfrm>
-            <a:off x="1051560" y="5422392"/>
-            <a:ext cx="3017520" cy="292608"/>
+            <a:off x="1097280" y="5422392"/>
+            <a:ext cx="2971800" cy="292608"/>
           </a:xfrm>
           <a:prstGeom prst="rect">
             <a:avLst/>
@@ -16441,8 +16441,8 @@
         </p:nvSpPr>
         <p:spPr>
           <a:xfrm>
-            <a:off x="1051560" y="5715000"/>
-            <a:ext cx="3017520" cy="365760"/>
+            <a:off x="1097280" y="5715000"/>
+            <a:ext cx="2971800" cy="365760"/>
           </a:xfrm>
           <a:prstGeom prst="rect">
             <a:avLst/>
@@ -16507,8 +16507,8 @@
         </p:nvSpPr>
         <p:spPr>
           <a:xfrm>
-            <a:off x="4535424" y="5550408"/>
-            <a:ext cx="329184" cy="329184"/>
+            <a:off x="4517136" y="5532120"/>
+            <a:ext cx="384048" cy="384048"/>
           </a:xfrm>
           <a:prstGeom prst="ellipse">
             <a:avLst/>
@@ -16532,8 +16532,8 @@
         </p:nvSpPr>
         <p:spPr>
           <a:xfrm>
-            <a:off x="4535424" y="5550408"/>
-            <a:ext cx="329184" cy="329184"/>
+            <a:off x="4517136" y="5532120"/>
+            <a:ext cx="384048" cy="384048"/>
           </a:xfrm>
           <a:prstGeom prst="rect">
             <a:avLst/>
@@ -16549,7 +16549,7 @@
               <a:buNone/>
             </a:pPr>
             <a:r>
-              <a:rPr lang="en-US" sz="1100" b="1" dirty="0">
+              <a:rPr lang="en-US" sz="1000" b="1" dirty="0">
                 <a:solidFill>
                   <a:srgbClr val="FFFFFF"/>
                 </a:solidFill>
@@ -16559,7 +16559,7 @@
               </a:rPr>
               <a:t>11</a:t>
             </a:r>
-            <a:endParaRPr lang="en-US" sz="1100" dirty="0"/>
+            <a:endParaRPr lang="en-US" sz="1000" dirty="0"/>
           </a:p>
         </p:txBody>
       </p:sp>
@@ -16571,8 +16571,8 @@
         </p:nvSpPr>
         <p:spPr>
           <a:xfrm>
-            <a:off x="4965192" y="5422392"/>
-            <a:ext cx="3017520" cy="292608"/>
+            <a:off x="5010912" y="5422392"/>
+            <a:ext cx="2971800" cy="292608"/>
           </a:xfrm>
           <a:prstGeom prst="rect">
             <a:avLst/>
@@ -16610,8 +16610,8 @@
         </p:nvSpPr>
         <p:spPr>
           <a:xfrm>
-            <a:off x="4965192" y="5715000"/>
-            <a:ext cx="3017520" cy="365760"/>
+            <a:off x="5010912" y="5715000"/>
+            <a:ext cx="2971800" cy="365760"/>
           </a:xfrm>
           <a:prstGeom prst="rect">
             <a:avLst/>
@@ -16676,8 +16676,8 @@
         </p:nvSpPr>
         <p:spPr>
           <a:xfrm>
-            <a:off x="8449056" y="5550408"/>
-            <a:ext cx="329184" cy="329184"/>
+            <a:off x="8430768" y="5532120"/>
+            <a:ext cx="384048" cy="384048"/>
           </a:xfrm>
           <a:prstGeom prst="ellipse">
             <a:avLst/>
@@ -16701,8 +16701,8 @@
         </p:nvSpPr>
         <p:spPr>
           <a:xfrm>
-            <a:off x="8449056" y="5550408"/>
-            <a:ext cx="329184" cy="329184"/>
+            <a:off x="8430768" y="5532120"/>
+            <a:ext cx="384048" cy="384048"/>
           </a:xfrm>
           <a:prstGeom prst="rect">
             <a:avLst/>
@@ -16718,7 +16718,7 @@
               <a:buNone/>
             </a:pPr>
             <a:r>
-              <a:rPr lang="en-US" sz="1100" b="1" dirty="0">
+              <a:rPr lang="en-US" sz="1000" b="1" dirty="0">
                 <a:solidFill>
                   <a:srgbClr val="FFFFFF"/>
                 </a:solidFill>
@@ -16728,7 +16728,7 @@
               </a:rPr>
               <a:t>12</a:t>
             </a:r>
-            <a:endParaRPr lang="en-US" sz="1100" dirty="0"/>
+            <a:endParaRPr lang="en-US" sz="1000" dirty="0"/>
           </a:p>
         </p:txBody>
       </p:sp>
@@ -16740,8 +16740,8 @@
         </p:nvSpPr>
         <p:spPr>
           <a:xfrm>
-            <a:off x="8878824" y="5422392"/>
-            <a:ext cx="3017520" cy="292608"/>
+            <a:off x="8924544" y="5422392"/>
+            <a:ext cx="2971800" cy="292608"/>
           </a:xfrm>
           <a:prstGeom prst="rect">
             <a:avLst/>
@@ -16779,8 +16779,8 @@
         </p:nvSpPr>
         <p:spPr>
           <a:xfrm>
-            <a:off x="8878824" y="5715000"/>
-            <a:ext cx="3017520" cy="365760"/>
+            <a:off x="8924544" y="5715000"/>
+            <a:ext cx="2971800" cy="365760"/>
           </a:xfrm>
           <a:prstGeom prst="rect">
             <a:avLst/>
